--- a/session1/exam-strategy/q4/q4_exam_strategy.pptx
+++ b/session1/exam-strategy/q4/q4_exam_strategy.pptx
@@ -3187,8 +3187,8 @@
         </p:nvSpPr>
         <p:spPr>
           <a:xfrm>
-            <a:off x="274320" y="685800"/>
-            <a:ext cx="6400800" cy="1645920"/>
+            <a:off x="274320" y="640080"/>
+            <a:ext cx="6583680" cy="1280160"/>
           </a:xfrm>
           <a:prstGeom prst="rect">
             <a:avLst/>
@@ -3196,13 +3196,13 @@
           <a:noFill/>
         </p:spPr>
         <p:txBody>
-          <a:bodyPr wrap="square">
+          <a:bodyPr wrap="square" tIns="0" bIns="0">
             <a:spAutoFit/>
           </a:bodyPr>
           <a:lstStyle/>
           <a:p>
             <a:pPr>
-              <a:defRPr sz="1100">
+              <a:defRPr sz="900">
                 <a:solidFill>
                   <a:srgbClr val="FFFFFF"/>
                 </a:solidFill>
@@ -3223,8 +3223,8 @@
         </p:nvSpPr>
         <p:spPr>
           <a:xfrm>
-            <a:off x="365760" y="2377440"/>
-            <a:ext cx="274320" cy="274320"/>
+            <a:off x="274320" y="2057400"/>
+            <a:ext cx="201168" cy="201168"/>
           </a:xfrm>
           <a:prstGeom prst="ellipse">
             <a:avLst/>
@@ -3255,7 +3255,7 @@
           <a:lstStyle/>
           <a:p>
             <a:pPr algn="ctr">
-              <a:defRPr sz="900" b="1">
+              <a:defRPr sz="700" b="1">
                 <a:solidFill>
                   <a:srgbClr val="FFFFFF"/>
                 </a:solidFill>
@@ -3275,8 +3275,8 @@
         </p:nvSpPr>
         <p:spPr>
           <a:xfrm>
-            <a:off x="777240" y="2377440"/>
-            <a:ext cx="5943600" cy="411480"/>
+            <a:off x="548640" y="2011680"/>
+            <a:ext cx="6400800" cy="736092"/>
           </a:xfrm>
           <a:prstGeom prst="rect">
             <a:avLst/>
@@ -3284,13 +3284,13 @@
           <a:noFill/>
         </p:spPr>
         <p:txBody>
-          <a:bodyPr wrap="square">
+          <a:bodyPr wrap="square" tIns="25400" bIns="0" lIns="0">
             <a:spAutoFit/>
           </a:bodyPr>
           <a:lstStyle/>
           <a:p>
             <a:pPr>
-              <a:defRPr sz="1000">
+              <a:defRPr sz="800">
                 <a:solidFill>
                   <a:srgbClr val="CCCCCC"/>
                 </a:solidFill>
@@ -3298,7 +3298,7 @@
               </a:defRPr>
             </a:pPr>
             <a:r>
-              <a:t>Configuring the EC2 instance to access the data through an Internet Gateway: This option does not address the security concern, as it would still require the EC2 instance to access S3 over the public Internet, which poses a security risk.</a:t>
+              <a:t>Configuring the EC2 instance to access the data through an Internet Gateway...</a:t>
             </a:r>
           </a:p>
         </p:txBody>
@@ -3311,8 +3311,8 @@
         </p:nvSpPr>
         <p:spPr>
           <a:xfrm>
-            <a:off x="365760" y="2834640"/>
-            <a:ext cx="274320" cy="274320"/>
+            <a:off x="274320" y="2811780"/>
+            <a:ext cx="201168" cy="201168"/>
           </a:xfrm>
           <a:prstGeom prst="ellipse">
             <a:avLst/>
@@ -3343,7 +3343,7 @@
           <a:lstStyle/>
           <a:p>
             <a:pPr algn="ctr">
-              <a:defRPr sz="900" b="1">
+              <a:defRPr sz="700" b="1">
                 <a:solidFill>
                   <a:srgbClr val="FFFFFF"/>
                 </a:solidFill>
@@ -3363,8 +3363,8 @@
         </p:nvSpPr>
         <p:spPr>
           <a:xfrm>
-            <a:off x="777240" y="2834640"/>
-            <a:ext cx="5943600" cy="411480"/>
+            <a:off x="548640" y="2766060"/>
+            <a:ext cx="6400800" cy="736092"/>
           </a:xfrm>
           <a:prstGeom prst="rect">
             <a:avLst/>
@@ -3372,13 +3372,13 @@
           <a:noFill/>
         </p:spPr>
         <p:txBody>
-          <a:bodyPr wrap="square">
+          <a:bodyPr wrap="square" tIns="25400" bIns="0" lIns="0">
             <a:spAutoFit/>
           </a:bodyPr>
           <a:lstStyle/>
           <a:p>
             <a:pPr>
-              <a:defRPr sz="1000">
+              <a:defRPr sz="800">
                 <a:solidFill>
                   <a:srgbClr val="CCCCCC"/>
                 </a:solidFill>
@@ -3386,7 +3386,7 @@
               </a:defRPr>
             </a:pPr>
             <a:r>
-              <a:t>Configuring the EC2 instance to access the data through a VPN connection: While a VPN connection can provide secure access to resources over the Internet, it does not eliminate the security risk associated with accessing S3 over the public Internet.</a:t>
+              <a:t>Configuring the EC2 instance to access the data through a VPN connection...</a:t>
             </a:r>
           </a:p>
         </p:txBody>
@@ -3399,8 +3399,8 @@
         </p:nvSpPr>
         <p:spPr>
           <a:xfrm>
-            <a:off x="365760" y="3291840"/>
-            <a:ext cx="274320" cy="274320"/>
+            <a:off x="274320" y="3566160"/>
+            <a:ext cx="201168" cy="201168"/>
           </a:xfrm>
           <a:prstGeom prst="ellipse">
             <a:avLst/>
@@ -3431,7 +3431,7 @@
           <a:lstStyle/>
           <a:p>
             <a:pPr algn="ctr">
-              <a:defRPr sz="900" b="1">
+              <a:defRPr sz="700" b="1">
                 <a:solidFill>
                   <a:srgbClr val="FFFFFF"/>
                 </a:solidFill>
@@ -3451,8 +3451,8 @@
         </p:nvSpPr>
         <p:spPr>
           <a:xfrm>
-            <a:off x="777240" y="3291840"/>
-            <a:ext cx="5943600" cy="411480"/>
+            <a:off x="548640" y="3520440"/>
+            <a:ext cx="6400800" cy="736092"/>
           </a:xfrm>
           <a:prstGeom prst="rect">
             <a:avLst/>
@@ -3460,13 +3460,13 @@
           <a:noFill/>
         </p:spPr>
         <p:txBody>
-          <a:bodyPr wrap="square">
+          <a:bodyPr wrap="square" tIns="25400" bIns="0" lIns="0">
             <a:spAutoFit/>
           </a:bodyPr>
           <a:lstStyle/>
           <a:p>
             <a:pPr>
-              <a:defRPr sz="1000">
+              <a:defRPr sz="800">
                 <a:solidFill>
                   <a:srgbClr val="CCCCCC"/>
                 </a:solidFill>
@@ -3474,7 +3474,7 @@
               </a:defRPr>
             </a:pPr>
             <a:r>
-              <a:t>Configuring the EC2 instance to access the data through a NAT Gateway: NAT Gateway allows instances in a private subnet to initiate outbound traffic to the Internet, but it does not provide a secure way to access resources like Amazon S3.</a:t>
+              <a:t>Configuring the EC2 instance to access the data through a NAT Gateway...</a:t>
             </a:r>
           </a:p>
         </p:txBody>
@@ -3487,8 +3487,8 @@
         </p:nvSpPr>
         <p:spPr>
           <a:xfrm>
-            <a:off x="365760" y="3749039"/>
-            <a:ext cx="274320" cy="274320"/>
+            <a:off x="274320" y="4320540"/>
+            <a:ext cx="201168" cy="201168"/>
           </a:xfrm>
           <a:prstGeom prst="ellipse">
             <a:avLst/>
@@ -3519,7 +3519,7 @@
           <a:lstStyle/>
           <a:p>
             <a:pPr algn="ctr">
-              <a:defRPr sz="900" b="1">
+              <a:defRPr sz="700" b="1">
                 <a:solidFill>
                   <a:srgbClr val="FFFFFF"/>
                 </a:solidFill>
@@ -3539,8 +3539,8 @@
         </p:nvSpPr>
         <p:spPr>
           <a:xfrm>
-            <a:off x="777240" y="3749039"/>
-            <a:ext cx="5943600" cy="411480"/>
+            <a:off x="548640" y="4274820"/>
+            <a:ext cx="6400800" cy="736092"/>
           </a:xfrm>
           <a:prstGeom prst="rect">
             <a:avLst/>
@@ -3548,13 +3548,13 @@
           <a:noFill/>
         </p:spPr>
         <p:txBody>
-          <a:bodyPr wrap="square">
+          <a:bodyPr wrap="square" tIns="25400" bIns="0" lIns="0">
             <a:spAutoFit/>
           </a:bodyPr>
           <a:lstStyle/>
           <a:p>
             <a:pPr>
-              <a:defRPr sz="1000">
+              <a:defRPr sz="800">
                 <a:solidFill>
                   <a:srgbClr val="CCCCCC"/>
                 </a:solidFill>
@@ -3844,8 +3844,8 @@
         </p:blipFill>
         <p:spPr>
           <a:xfrm>
-            <a:off x="182880" y="914400"/>
-            <a:ext cx="5280660" cy="3840480"/>
+            <a:off x="182880" y="1925699"/>
+            <a:ext cx="5303520" cy="1817880"/>
           </a:xfrm>
           <a:prstGeom prst="rect">
             <a:avLst/>
@@ -3980,9 +3980,9 @@
           <a:p>
             <a:pPr>
               <a:spcAft>
-                <a:spcPts val="600"/>
+                <a:spcPts val="400"/>
               </a:spcAft>
-              <a:defRPr sz="900">
+              <a:defRPr sz="800">
                 <a:solidFill>
                   <a:srgbClr val="212121"/>
                 </a:solidFill>
@@ -3990,7 +3990,39 @@
               </a:defRPr>
             </a:pPr>
             <a:r>
-              <a:t>• Configuring the EC2 instance to access the data through an Internet Gateway: This option does not address the security concern, as it would still require the EC2 instance to access S3 over the public Internet, which poses a security risk.</a:t>
+              <a:t>• Configuring the EC2 instance to access the data through an Internet Gateway: This option does not address the security concern</a:t>
+            </a:r>
+          </a:p>
+          <a:p>
+            <a:pPr>
+              <a:spcAft>
+                <a:spcPts val="400"/>
+              </a:spcAft>
+              <a:defRPr sz="800">
+                <a:solidFill>
+                  <a:srgbClr val="212121"/>
+                </a:solidFill>
+                <a:latin typeface="Segoe UI"/>
+              </a:defRPr>
+            </a:pPr>
+            <a:r>
+              <a:t>• Would still require the EC2 instance to access S3 over the public Internet</a:t>
+            </a:r>
+          </a:p>
+          <a:p>
+            <a:pPr>
+              <a:spcAft>
+                <a:spcPts val="400"/>
+              </a:spcAft>
+              <a:defRPr sz="800">
+                <a:solidFill>
+                  <a:srgbClr val="212121"/>
+                </a:solidFill>
+                <a:latin typeface="Segoe UI"/>
+              </a:defRPr>
+            </a:pPr>
+            <a:r>
+              <a:t>• Poses a security risk</a:t>
             </a:r>
           </a:p>
         </p:txBody>
@@ -4169,8 +4201,8 @@
         </p:blipFill>
         <p:spPr>
           <a:xfrm>
-            <a:off x="182880" y="914400"/>
-            <a:ext cx="5280660" cy="3840480"/>
+            <a:off x="182880" y="1761844"/>
+            <a:ext cx="5303520" cy="2145591"/>
           </a:xfrm>
           <a:prstGeom prst="rect">
             <a:avLst/>
@@ -4305,9 +4337,9 @@
           <a:p>
             <a:pPr>
               <a:spcAft>
-                <a:spcPts val="600"/>
+                <a:spcPts val="400"/>
               </a:spcAft>
-              <a:defRPr sz="900">
+              <a:defRPr sz="800">
                 <a:solidFill>
                   <a:srgbClr val="212121"/>
                 </a:solidFill>
@@ -4315,7 +4347,23 @@
               </a:defRPr>
             </a:pPr>
             <a:r>
-              <a:t>• Configuring the EC2 instance to access the data through a VPN connection: While a VPN connection can provide secure access to resources over the Internet, it does not eliminate the security risk associated with accessing S3 over the public Internet.</a:t>
+              <a:t>• Configuring the EC2 instance to access the data through a VPN connection: While a VPN connection can provide secure access to resources over the Internet</a:t>
+            </a:r>
+          </a:p>
+          <a:p>
+            <a:pPr>
+              <a:spcAft>
+                <a:spcPts val="400"/>
+              </a:spcAft>
+              <a:defRPr sz="800">
+                <a:solidFill>
+                  <a:srgbClr val="212121"/>
+                </a:solidFill>
+                <a:latin typeface="Segoe UI"/>
+              </a:defRPr>
+            </a:pPr>
+            <a:r>
+              <a:t>• Not eliminate the security risk associated with accessing S3 over the public Internet</a:t>
             </a:r>
           </a:p>
         </p:txBody>
@@ -4494,8 +4542,8 @@
         </p:blipFill>
         <p:spPr>
           <a:xfrm>
-            <a:off x="182880" y="1466854"/>
-            <a:ext cx="5303520" cy="2735570"/>
+            <a:off x="182880" y="1950339"/>
+            <a:ext cx="5303520" cy="1768600"/>
           </a:xfrm>
           <a:prstGeom prst="rect">
             <a:avLst/>
@@ -4630,9 +4678,9 @@
           <a:p>
             <a:pPr>
               <a:spcAft>
-                <a:spcPts val="600"/>
+                <a:spcPts val="400"/>
               </a:spcAft>
-              <a:defRPr sz="900">
+              <a:defRPr sz="800">
                 <a:solidFill>
                   <a:srgbClr val="212121"/>
                 </a:solidFill>
@@ -4640,7 +4688,23 @@
               </a:defRPr>
             </a:pPr>
             <a:r>
-              <a:t>• Configuring the EC2 instance to access the data through a NAT Gateway: NAT Gateway allows instances in a private subnet to initiate outbound traffic to the Internet, but it does not provide a secure way to access resources like Amazon S3.</a:t>
+              <a:t>• Configuring the EC2 instance to access the data through a NAT Gateway: NAT Gateway allows instances in a private subnet to initiate outbound traffic to the Internet</a:t>
+            </a:r>
+          </a:p>
+          <a:p>
+            <a:pPr>
+              <a:spcAft>
+                <a:spcPts val="400"/>
+              </a:spcAft>
+              <a:defRPr sz="800">
+                <a:solidFill>
+                  <a:srgbClr val="212121"/>
+                </a:solidFill>
+                <a:latin typeface="Segoe UI"/>
+              </a:defRPr>
+            </a:pPr>
+            <a:r>
+              <a:t>• But it does not provide a secure way to access resources like Amazon S3</a:t>
             </a:r>
           </a:p>
         </p:txBody>
@@ -4819,8 +4883,8 @@
         </p:blipFill>
         <p:spPr>
           <a:xfrm>
-            <a:off x="182880" y="1466854"/>
-            <a:ext cx="5303520" cy="2735570"/>
+            <a:off x="182880" y="1596269"/>
+            <a:ext cx="5303520" cy="2476740"/>
           </a:xfrm>
           <a:prstGeom prst="rect">
             <a:avLst/>
@@ -4955,9 +5019,9 @@
           <a:p>
             <a:pPr>
               <a:spcAft>
-                <a:spcPts val="600"/>
+                <a:spcPts val="400"/>
               </a:spcAft>
-              <a:defRPr sz="900">
+              <a:defRPr sz="800">
                 <a:solidFill>
                   <a:srgbClr val="212121"/>
                 </a:solidFill>
@@ -4965,15 +5029,15 @@
               </a:defRPr>
             </a:pPr>
             <a:r>
-              <a:t>• Configure the EC2 instance to access the data through a VPC endpoint for Amazon S3.</a:t>
+              <a:t>• Configure the EC2 instance to access the data through a VPC endpoint for Amazon S3</a:t>
             </a:r>
           </a:p>
           <a:p>
             <a:pPr>
               <a:spcAft>
-                <a:spcPts val="600"/>
+                <a:spcPts val="400"/>
               </a:spcAft>
-              <a:defRPr sz="900">
+              <a:defRPr sz="800">
                 <a:solidFill>
                   <a:srgbClr val="212121"/>
                 </a:solidFill>
@@ -4981,15 +5045,15 @@
               </a:defRPr>
             </a:pPr>
             <a:r>
-              <a:t>• This solution resolves the security concern by ensuring that the EC2 instance can access the data stored on Amazon S3 without traversing the public Internet.</a:t>
+              <a:t>• This solution resolves the security concern by ensuring that the EC2 instance can access the data stored on Amazon S3 without traversing the public Internet</a:t>
             </a:r>
           </a:p>
           <a:p>
             <a:pPr>
               <a:spcAft>
-                <a:spcPts val="600"/>
+                <a:spcPts val="400"/>
               </a:spcAft>
-              <a:defRPr sz="900">
+              <a:defRPr sz="800">
                 <a:solidFill>
                   <a:srgbClr val="212121"/>
                 </a:solidFill>
@@ -4997,15 +5061,15 @@
               </a:defRPr>
             </a:pPr>
             <a:r>
-              <a:t>• A VPC endpoint for Amazon S3 allows communication between the EC2 instance and S3 to occur entirely within the AWS network, eliminating the need for Internet access.</a:t>
+              <a:t>• A VPC endpoint for Amazon S3 allows communication between the EC2 instance and S3 to occur entirely within the AWS network</a:t>
             </a:r>
           </a:p>
           <a:p>
             <a:pPr>
               <a:spcAft>
-                <a:spcPts val="600"/>
+                <a:spcPts val="400"/>
               </a:spcAft>
-              <a:defRPr sz="900">
+              <a:defRPr sz="800">
                 <a:solidFill>
                   <a:srgbClr val="212121"/>
                 </a:solidFill>
@@ -5013,7 +5077,23 @@
               </a:defRPr>
             </a:pPr>
             <a:r>
-              <a:t>• This enhances security by reducing exposure to potential security risks associated with Internet connectivity.</a:t>
+              <a:t>• The need for Internet access</a:t>
+            </a:r>
+          </a:p>
+          <a:p>
+            <a:pPr>
+              <a:spcAft>
+                <a:spcPts val="400"/>
+              </a:spcAft>
+              <a:defRPr sz="800">
+                <a:solidFill>
+                  <a:srgbClr val="212121"/>
+                </a:solidFill>
+                <a:latin typeface="Segoe UI"/>
+              </a:defRPr>
+            </a:pPr>
+            <a:r>
+              <a:t>• This enhances security by reducing exposure to potential security risks associated with Internet connectivity</a:t>
             </a:r>
           </a:p>
         </p:txBody>

--- a/session1/exam-strategy/q4/q4_exam_strategy.pptx
+++ b/session1/exam-strategy/q4/q4_exam_strategy.pptx
@@ -3187,8 +3187,8 @@
         </p:nvSpPr>
         <p:spPr>
           <a:xfrm>
-            <a:off x="274320" y="640080"/>
-            <a:ext cx="6583680" cy="1280160"/>
+            <a:off x="274320" y="685800"/>
+            <a:ext cx="6400800" cy="1645920"/>
           </a:xfrm>
           <a:prstGeom prst="rect">
             <a:avLst/>
@@ -3196,13 +3196,13 @@
           <a:noFill/>
         </p:spPr>
         <p:txBody>
-          <a:bodyPr wrap="square" tIns="0" bIns="0">
+          <a:bodyPr wrap="square">
             <a:spAutoFit/>
           </a:bodyPr>
           <a:lstStyle/>
           <a:p>
             <a:pPr>
-              <a:defRPr sz="900">
+              <a:defRPr sz="1100">
                 <a:solidFill>
                   <a:srgbClr val="FFFFFF"/>
                 </a:solidFill>
@@ -3223,8 +3223,8 @@
         </p:nvSpPr>
         <p:spPr>
           <a:xfrm>
-            <a:off x="274320" y="2057400"/>
-            <a:ext cx="201168" cy="201168"/>
+            <a:off x="365760" y="2377440"/>
+            <a:ext cx="274320" cy="274320"/>
           </a:xfrm>
           <a:prstGeom prst="ellipse">
             <a:avLst/>
@@ -3255,7 +3255,7 @@
           <a:lstStyle/>
           <a:p>
             <a:pPr algn="ctr">
-              <a:defRPr sz="700" b="1">
+              <a:defRPr sz="900" b="1">
                 <a:solidFill>
                   <a:srgbClr val="FFFFFF"/>
                 </a:solidFill>
@@ -3275,8 +3275,8 @@
         </p:nvSpPr>
         <p:spPr>
           <a:xfrm>
-            <a:off x="548640" y="2011680"/>
-            <a:ext cx="6400800" cy="736092"/>
+            <a:off x="777240" y="2377440"/>
+            <a:ext cx="5943600" cy="411480"/>
           </a:xfrm>
           <a:prstGeom prst="rect">
             <a:avLst/>
@@ -3284,13 +3284,13 @@
           <a:noFill/>
         </p:spPr>
         <p:txBody>
-          <a:bodyPr wrap="square" tIns="25400" bIns="0" lIns="0">
+          <a:bodyPr wrap="square">
             <a:spAutoFit/>
           </a:bodyPr>
           <a:lstStyle/>
           <a:p>
             <a:pPr>
-              <a:defRPr sz="800">
+              <a:defRPr sz="1000">
                 <a:solidFill>
                   <a:srgbClr val="CCCCCC"/>
                 </a:solidFill>
@@ -3298,7 +3298,7 @@
               </a:defRPr>
             </a:pPr>
             <a:r>
-              <a:t>Configuring the EC2 instance to access the data through an Internet Gateway...</a:t>
+              <a:t>Configuring the EC2 instance to access the data through an Internet Gateway: This option does not address the security concern, as it would still require the EC2 instance to access S3 over the public Internet, which poses a security risk.</a:t>
             </a:r>
           </a:p>
         </p:txBody>
@@ -3311,8 +3311,8 @@
         </p:nvSpPr>
         <p:spPr>
           <a:xfrm>
-            <a:off x="274320" y="2811780"/>
-            <a:ext cx="201168" cy="201168"/>
+            <a:off x="365760" y="2834640"/>
+            <a:ext cx="274320" cy="274320"/>
           </a:xfrm>
           <a:prstGeom prst="ellipse">
             <a:avLst/>
@@ -3343,7 +3343,7 @@
           <a:lstStyle/>
           <a:p>
             <a:pPr algn="ctr">
-              <a:defRPr sz="700" b="1">
+              <a:defRPr sz="900" b="1">
                 <a:solidFill>
                   <a:srgbClr val="FFFFFF"/>
                 </a:solidFill>
@@ -3363,8 +3363,8 @@
         </p:nvSpPr>
         <p:spPr>
           <a:xfrm>
-            <a:off x="548640" y="2766060"/>
-            <a:ext cx="6400800" cy="736092"/>
+            <a:off x="777240" y="2834640"/>
+            <a:ext cx="5943600" cy="411480"/>
           </a:xfrm>
           <a:prstGeom prst="rect">
             <a:avLst/>
@@ -3372,13 +3372,13 @@
           <a:noFill/>
         </p:spPr>
         <p:txBody>
-          <a:bodyPr wrap="square" tIns="25400" bIns="0" lIns="0">
+          <a:bodyPr wrap="square">
             <a:spAutoFit/>
           </a:bodyPr>
           <a:lstStyle/>
           <a:p>
             <a:pPr>
-              <a:defRPr sz="800">
+              <a:defRPr sz="1000">
                 <a:solidFill>
                   <a:srgbClr val="CCCCCC"/>
                 </a:solidFill>
@@ -3386,7 +3386,7 @@
               </a:defRPr>
             </a:pPr>
             <a:r>
-              <a:t>Configuring the EC2 instance to access the data through a VPN connection...</a:t>
+              <a:t>Configuring the EC2 instance to access the data through a VPN connection: While a VPN connection can provide secure access to resources over the Internet, it does not eliminate the security risk associated with accessing S3 over the public Internet.</a:t>
             </a:r>
           </a:p>
         </p:txBody>
@@ -3399,8 +3399,8 @@
         </p:nvSpPr>
         <p:spPr>
           <a:xfrm>
-            <a:off x="274320" y="3566160"/>
-            <a:ext cx="201168" cy="201168"/>
+            <a:off x="365760" y="3291840"/>
+            <a:ext cx="274320" cy="274320"/>
           </a:xfrm>
           <a:prstGeom prst="ellipse">
             <a:avLst/>
@@ -3431,7 +3431,7 @@
           <a:lstStyle/>
           <a:p>
             <a:pPr algn="ctr">
-              <a:defRPr sz="700" b="1">
+              <a:defRPr sz="900" b="1">
                 <a:solidFill>
                   <a:srgbClr val="FFFFFF"/>
                 </a:solidFill>
@@ -3451,8 +3451,8 @@
         </p:nvSpPr>
         <p:spPr>
           <a:xfrm>
-            <a:off x="548640" y="3520440"/>
-            <a:ext cx="6400800" cy="736092"/>
+            <a:off x="777240" y="3291840"/>
+            <a:ext cx="5943600" cy="411480"/>
           </a:xfrm>
           <a:prstGeom prst="rect">
             <a:avLst/>
@@ -3460,13 +3460,13 @@
           <a:noFill/>
         </p:spPr>
         <p:txBody>
-          <a:bodyPr wrap="square" tIns="25400" bIns="0" lIns="0">
+          <a:bodyPr wrap="square">
             <a:spAutoFit/>
           </a:bodyPr>
           <a:lstStyle/>
           <a:p>
             <a:pPr>
-              <a:defRPr sz="800">
+              <a:defRPr sz="1000">
                 <a:solidFill>
                   <a:srgbClr val="CCCCCC"/>
                 </a:solidFill>
@@ -3474,7 +3474,7 @@
               </a:defRPr>
             </a:pPr>
             <a:r>
-              <a:t>Configuring the EC2 instance to access the data through a NAT Gateway...</a:t>
+              <a:t>Configuring the EC2 instance to access the data through a NAT Gateway: NAT Gateway allows instances in a private subnet to initiate outbound traffic to the Internet, but it does not provide a secure way to access resources like Amazon S3.</a:t>
             </a:r>
           </a:p>
         </p:txBody>
@@ -3487,8 +3487,8 @@
         </p:nvSpPr>
         <p:spPr>
           <a:xfrm>
-            <a:off x="274320" y="4320540"/>
-            <a:ext cx="201168" cy="201168"/>
+            <a:off x="365760" y="3749039"/>
+            <a:ext cx="274320" cy="274320"/>
           </a:xfrm>
           <a:prstGeom prst="ellipse">
             <a:avLst/>
@@ -3519,7 +3519,7 @@
           <a:lstStyle/>
           <a:p>
             <a:pPr algn="ctr">
-              <a:defRPr sz="700" b="1">
+              <a:defRPr sz="900" b="1">
                 <a:solidFill>
                   <a:srgbClr val="FFFFFF"/>
                 </a:solidFill>
@@ -3539,8 +3539,8 @@
         </p:nvSpPr>
         <p:spPr>
           <a:xfrm>
-            <a:off x="548640" y="4274820"/>
-            <a:ext cx="6400800" cy="736092"/>
+            <a:off x="777240" y="3749039"/>
+            <a:ext cx="5943600" cy="411480"/>
           </a:xfrm>
           <a:prstGeom prst="rect">
             <a:avLst/>
@@ -3548,13 +3548,13 @@
           <a:noFill/>
         </p:spPr>
         <p:txBody>
-          <a:bodyPr wrap="square" tIns="25400" bIns="0" lIns="0">
+          <a:bodyPr wrap="square">
             <a:spAutoFit/>
           </a:bodyPr>
           <a:lstStyle/>
           <a:p>
             <a:pPr>
-              <a:defRPr sz="800">
+              <a:defRPr sz="1000">
                 <a:solidFill>
                   <a:srgbClr val="CCCCCC"/>
                 </a:solidFill>
@@ -3844,8 +3844,8 @@
         </p:blipFill>
         <p:spPr>
           <a:xfrm>
-            <a:off x="182880" y="1925699"/>
-            <a:ext cx="5303520" cy="1817880"/>
+            <a:off x="182880" y="1901370"/>
+            <a:ext cx="5303520" cy="1866539"/>
           </a:xfrm>
           <a:prstGeom prst="rect">
             <a:avLst/>
@@ -3980,9 +3980,9 @@
           <a:p>
             <a:pPr>
               <a:spcAft>
-                <a:spcPts val="400"/>
+                <a:spcPts val="600"/>
               </a:spcAft>
-              <a:defRPr sz="800">
+              <a:defRPr sz="900">
                 <a:solidFill>
                   <a:srgbClr val="212121"/>
                 </a:solidFill>
@@ -3990,39 +3990,7 @@
               </a:defRPr>
             </a:pPr>
             <a:r>
-              <a:t>• Configuring the EC2 instance to access the data through an Internet Gateway: This option does not address the security concern</a:t>
-            </a:r>
-          </a:p>
-          <a:p>
-            <a:pPr>
-              <a:spcAft>
-                <a:spcPts val="400"/>
-              </a:spcAft>
-              <a:defRPr sz="800">
-                <a:solidFill>
-                  <a:srgbClr val="212121"/>
-                </a:solidFill>
-                <a:latin typeface="Segoe UI"/>
-              </a:defRPr>
-            </a:pPr>
-            <a:r>
-              <a:t>• Would still require the EC2 instance to access S3 over the public Internet</a:t>
-            </a:r>
-          </a:p>
-          <a:p>
-            <a:pPr>
-              <a:spcAft>
-                <a:spcPts val="400"/>
-              </a:spcAft>
-              <a:defRPr sz="800">
-                <a:solidFill>
-                  <a:srgbClr val="212121"/>
-                </a:solidFill>
-                <a:latin typeface="Segoe UI"/>
-              </a:defRPr>
-            </a:pPr>
-            <a:r>
-              <a:t>• Poses a security risk</a:t>
+              <a:t>• Configuring the EC2 instance to access the data through an Internet Gateway: This option does not address the security concern, as it would still require the EC2 instance to access S3 over the public Internet, which poses a security risk.</a:t>
             </a:r>
           </a:p>
         </p:txBody>
@@ -4201,8 +4169,8 @@
         </p:blipFill>
         <p:spPr>
           <a:xfrm>
-            <a:off x="182880" y="1761844"/>
-            <a:ext cx="5303520" cy="2145591"/>
+            <a:off x="182880" y="1998128"/>
+            <a:ext cx="5303520" cy="1673022"/>
           </a:xfrm>
           <a:prstGeom prst="rect">
             <a:avLst/>
@@ -4337,9 +4305,9 @@
           <a:p>
             <a:pPr>
               <a:spcAft>
-                <a:spcPts val="400"/>
+                <a:spcPts val="600"/>
               </a:spcAft>
-              <a:defRPr sz="800">
+              <a:defRPr sz="900">
                 <a:solidFill>
                   <a:srgbClr val="212121"/>
                 </a:solidFill>
@@ -4347,23 +4315,7 @@
               </a:defRPr>
             </a:pPr>
             <a:r>
-              <a:t>• Configuring the EC2 instance to access the data through a VPN connection: While a VPN connection can provide secure access to resources over the Internet</a:t>
-            </a:r>
-          </a:p>
-          <a:p>
-            <a:pPr>
-              <a:spcAft>
-                <a:spcPts val="400"/>
-              </a:spcAft>
-              <a:defRPr sz="800">
-                <a:solidFill>
-                  <a:srgbClr val="212121"/>
-                </a:solidFill>
-                <a:latin typeface="Segoe UI"/>
-              </a:defRPr>
-            </a:pPr>
-            <a:r>
-              <a:t>• Not eliminate the security risk associated with accessing S3 over the public Internet</a:t>
+              <a:t>• Configuring the EC2 instance to access the data through a VPN connection: While a VPN connection can provide secure access to resources over the Internet, it does not eliminate the security risk associated with accessing S3 over the public Internet.</a:t>
             </a:r>
           </a:p>
         </p:txBody>
@@ -4542,8 +4494,8 @@
         </p:blipFill>
         <p:spPr>
           <a:xfrm>
-            <a:off x="182880" y="1950339"/>
-            <a:ext cx="5303520" cy="1768600"/>
+            <a:off x="182880" y="1973240"/>
+            <a:ext cx="5303520" cy="1722799"/>
           </a:xfrm>
           <a:prstGeom prst="rect">
             <a:avLst/>
@@ -4678,9 +4630,9 @@
           <a:p>
             <a:pPr>
               <a:spcAft>
-                <a:spcPts val="400"/>
+                <a:spcPts val="600"/>
               </a:spcAft>
-              <a:defRPr sz="800">
+              <a:defRPr sz="900">
                 <a:solidFill>
                   <a:srgbClr val="212121"/>
                 </a:solidFill>
@@ -4688,23 +4640,7 @@
               </a:defRPr>
             </a:pPr>
             <a:r>
-              <a:t>• Configuring the EC2 instance to access the data through a NAT Gateway: NAT Gateway allows instances in a private subnet to initiate outbound traffic to the Internet</a:t>
-            </a:r>
-          </a:p>
-          <a:p>
-            <a:pPr>
-              <a:spcAft>
-                <a:spcPts val="400"/>
-              </a:spcAft>
-              <a:defRPr sz="800">
-                <a:solidFill>
-                  <a:srgbClr val="212121"/>
-                </a:solidFill>
-                <a:latin typeface="Segoe UI"/>
-              </a:defRPr>
-            </a:pPr>
-            <a:r>
-              <a:t>• But it does not provide a secure way to access resources like Amazon S3</a:t>
+              <a:t>• Configuring the EC2 instance to access the data through a NAT Gateway: NAT Gateway allows instances in a private subnet to initiate outbound traffic to the Internet, but it does not provide a secure way to access resources like Amazon S3.</a:t>
             </a:r>
           </a:p>
         </p:txBody>
@@ -4883,8 +4819,8 @@
         </p:blipFill>
         <p:spPr>
           <a:xfrm>
-            <a:off x="182880" y="1596269"/>
-            <a:ext cx="5303520" cy="2476740"/>
+            <a:off x="182880" y="1674630"/>
+            <a:ext cx="5303520" cy="2320018"/>
           </a:xfrm>
           <a:prstGeom prst="rect">
             <a:avLst/>
@@ -5019,9 +4955,9 @@
           <a:p>
             <a:pPr>
               <a:spcAft>
-                <a:spcPts val="400"/>
+                <a:spcPts val="600"/>
               </a:spcAft>
-              <a:defRPr sz="800">
+              <a:defRPr sz="900">
                 <a:solidFill>
                   <a:srgbClr val="212121"/>
                 </a:solidFill>
@@ -5029,15 +4965,15 @@
               </a:defRPr>
             </a:pPr>
             <a:r>
-              <a:t>• Configure the EC2 instance to access the data through a VPC endpoint for Amazon S3</a:t>
+              <a:t>• Configure the EC2 instance to access the data through a VPC endpoint for Amazon S3.</a:t>
             </a:r>
           </a:p>
           <a:p>
             <a:pPr>
               <a:spcAft>
-                <a:spcPts val="400"/>
+                <a:spcPts val="600"/>
               </a:spcAft>
-              <a:defRPr sz="800">
+              <a:defRPr sz="900">
                 <a:solidFill>
                   <a:srgbClr val="212121"/>
                 </a:solidFill>
@@ -5045,15 +4981,15 @@
               </a:defRPr>
             </a:pPr>
             <a:r>
-              <a:t>• This solution resolves the security concern by ensuring that the EC2 instance can access the data stored on Amazon S3 without traversing the public Internet</a:t>
+              <a:t>• This solution resolves the security concern by ensuring that the EC2 instance can access the data stored on Amazon S3 without traversing the public Internet.</a:t>
             </a:r>
           </a:p>
           <a:p>
             <a:pPr>
               <a:spcAft>
-                <a:spcPts val="400"/>
+                <a:spcPts val="600"/>
               </a:spcAft>
-              <a:defRPr sz="800">
+              <a:defRPr sz="900">
                 <a:solidFill>
                   <a:srgbClr val="212121"/>
                 </a:solidFill>
@@ -5061,15 +4997,15 @@
               </a:defRPr>
             </a:pPr>
             <a:r>
-              <a:t>• A VPC endpoint for Amazon S3 allows communication between the EC2 instance and S3 to occur entirely within the AWS network</a:t>
+              <a:t>• A VPC endpoint for Amazon S3 allows communication between the EC2 instance and S3 to occur entirely within the AWS network, eliminating the need for Internet access.</a:t>
             </a:r>
           </a:p>
           <a:p>
             <a:pPr>
               <a:spcAft>
-                <a:spcPts val="400"/>
+                <a:spcPts val="600"/>
               </a:spcAft>
-              <a:defRPr sz="800">
+              <a:defRPr sz="900">
                 <a:solidFill>
                   <a:srgbClr val="212121"/>
                 </a:solidFill>
@@ -5077,23 +5013,7 @@
               </a:defRPr>
             </a:pPr>
             <a:r>
-              <a:t>• The need for Internet access</a:t>
-            </a:r>
-          </a:p>
-          <a:p>
-            <a:pPr>
-              <a:spcAft>
-                <a:spcPts val="400"/>
-              </a:spcAft>
-              <a:defRPr sz="800">
-                <a:solidFill>
-                  <a:srgbClr val="212121"/>
-                </a:solidFill>
-                <a:latin typeface="Segoe UI"/>
-              </a:defRPr>
-            </a:pPr>
-            <a:r>
-              <a:t>• This enhances security by reducing exposure to potential security risks associated with Internet connectivity</a:t>
+              <a:t>• This enhances security by reducing exposure to potential security risks associated with Internet connectivity.</a:t>
             </a:r>
           </a:p>
         </p:txBody>
